--- a/Land-Rover-Jaguar-Prezentace.pptx
+++ b/Land-Rover-Jaguar-Prezentace.pptx
@@ -708,7 +708,7 @@
                   <c:v>1</c:v>
                 </c:pt>
                 <c:pt idx="1">
-                  <c:v>4</c:v>
+                  <c:v>2</c:v>
                 </c:pt>
                 <c:pt idx="2">
                   <c:v>1</c:v>
@@ -729,7 +729,7 @@
                   <c:v>0</c:v>
                 </c:pt>
                 <c:pt idx="8">
-                  <c:v>2</c:v>
+                  <c:v>0</c:v>
                 </c:pt>
                 <c:pt idx="9">
                   <c:v>2</c:v>
@@ -738,7 +738,7 @@
                   <c:v>1</c:v>
                 </c:pt>
                 <c:pt idx="11">
-                  <c:v>3</c:v>
+                  <c:v>1</c:v>
                 </c:pt>
               </c:numCache>
             </c:numRef>
@@ -1158,10 +1158,10 @@
                 <c:formatCode>General</c:formatCode>
                 <c:ptCount val="12"/>
                 <c:pt idx="0">
-                  <c:v>2</c:v>
+                  <c:v>1</c:v>
                 </c:pt>
                 <c:pt idx="1">
-                  <c:v>2</c:v>
+                  <c:v>1</c:v>
                 </c:pt>
                 <c:pt idx="2">
                   <c:v>1</c:v>
@@ -1176,7 +1176,7 @@
                   <c:v>1</c:v>
                 </c:pt>
                 <c:pt idx="6">
-                  <c:v>7</c:v>
+                  <c:v>6</c:v>
                 </c:pt>
                 <c:pt idx="7">
                   <c:v>2</c:v>
@@ -1296,7 +1296,7 @@
                 <c:formatCode>General</c:formatCode>
                 <c:ptCount val="12"/>
                 <c:pt idx="0">
-                  <c:v>9</c:v>
+                  <c:v>8</c:v>
                 </c:pt>
                 <c:pt idx="1">
                   <c:v>4</c:v>
@@ -1627,7 +1627,7 @@
               <c:strCache>
                 <c:ptCount val="1"/>
                 <c:pt idx="0">
-                  <c:v>Náklad na reklamace</c:v>
+                  <c:v>Náklad na reklamace (bez optiky)</c:v>
                 </c:pt>
               </c:strCache>
             </c:strRef>
@@ -1686,10 +1686,10 @@
                 <c:formatCode>General</c:formatCode>
                 <c:ptCount val="2"/>
                 <c:pt idx="0">
-                  <c:v>36527</c:v>
+                  <c:v>34075</c:v>
                 </c:pt>
                 <c:pt idx="1">
-                  <c:v>44750</c:v>
+                  <c:v>43767</c:v>
                 </c:pt>
               </c:numCache>
             </c:numRef>
@@ -1938,16 +1938,16 @@
                     <c:v>Citroën</c:v>
                   </c:pt>
                   <c:pt idx="4">
+                    <c:v>Ford</c:v>
+                  </c:pt>
+                  <c:pt idx="5">
                     <c:v>Škoda</c:v>
                   </c:pt>
-                  <c:pt idx="5">
-                    <c:v>Ford</c:v>
-                  </c:pt>
                   <c:pt idx="6">
+                    <c:v>Hyundai</c:v>
+                  </c:pt>
+                  <c:pt idx="7">
                     <c:v>Kia</c:v>
-                  </c:pt>
-                  <c:pt idx="7">
-                    <c:v>Hyundai</c:v>
                   </c:pt>
                   <c:pt idx="8">
                     <c:v>Volkswagen</c:v>
@@ -1962,10 +1962,10 @@
                     <c:v>Mercedes-Benz</c:v>
                   </c:pt>
                   <c:pt idx="12">
+                    <c:v>Mazda</c:v>
+                  </c:pt>
+                  <c:pt idx="13">
                     <c:v>Toyota</c:v>
-                  </c:pt>
-                  <c:pt idx="13">
-                    <c:v>Mazda</c:v>
                   </c:pt>
                   <c:pt idx="14">
                     <c:v>Dacia</c:v>
@@ -1981,7 +1981,7 @@
                 <c:formatCode>General</c:formatCode>
                 <c:ptCount val="15"/>
                 <c:pt idx="0">
-                  <c:v>50.5</c:v>
+                  <c:v>48.4</c:v>
                 </c:pt>
                 <c:pt idx="1">
                   <c:v/>
@@ -2094,16 +2094,16 @@
                     <c:v>Citroën</c:v>
                   </c:pt>
                   <c:pt idx="4">
+                    <c:v>Ford</c:v>
+                  </c:pt>
+                  <c:pt idx="5">
                     <c:v>Škoda</c:v>
                   </c:pt>
-                  <c:pt idx="5">
-                    <c:v>Ford</c:v>
-                  </c:pt>
                   <c:pt idx="6">
+                    <c:v>Hyundai</c:v>
+                  </c:pt>
+                  <c:pt idx="7">
                     <c:v>Kia</c:v>
-                  </c:pt>
-                  <c:pt idx="7">
-                    <c:v>Hyundai</c:v>
                   </c:pt>
                   <c:pt idx="8">
                     <c:v>Volkswagen</c:v>
@@ -2118,10 +2118,10 @@
                     <c:v>Mercedes-Benz</c:v>
                   </c:pt>
                   <c:pt idx="12">
+                    <c:v>Mazda</c:v>
+                  </c:pt>
+                  <c:pt idx="13">
                     <c:v>Toyota</c:v>
-                  </c:pt>
-                  <c:pt idx="13">
-                    <c:v>Mazda</c:v>
                   </c:pt>
                   <c:pt idx="14">
                     <c:v>Dacia</c:v>
@@ -2140,46 +2140,46 @@
                   <c:v/>
                 </c:pt>
                 <c:pt idx="1">
-                  <c:v>22.6</c:v>
+                  <c:v>20.5</c:v>
                 </c:pt>
                 <c:pt idx="2">
-                  <c:v>20.4</c:v>
+                  <c:v>16.1</c:v>
                 </c:pt>
                 <c:pt idx="3">
-                  <c:v>16.5</c:v>
+                  <c:v>14.5</c:v>
                 </c:pt>
                 <c:pt idx="4">
-                  <c:v>14.4</c:v>
+                  <c:v>11.9</c:v>
                 </c:pt>
                 <c:pt idx="5">
-                  <c:v>14.3</c:v>
+                  <c:v>11.8</c:v>
                 </c:pt>
                 <c:pt idx="6">
-                  <c:v>14.3</c:v>
+                  <c:v>11.7</c:v>
                 </c:pt>
                 <c:pt idx="7">
-                  <c:v>12.4</c:v>
+                  <c:v>11.2</c:v>
                 </c:pt>
                 <c:pt idx="8">
-                  <c:v>12.2</c:v>
+                  <c:v>9.7</c:v>
                 </c:pt>
                 <c:pt idx="9">
-                  <c:v>11.1</c:v>
+                  <c:v>9.5</c:v>
                 </c:pt>
                 <c:pt idx="10">
-                  <c:v>10.9</c:v>
+                  <c:v>8.3</c:v>
                 </c:pt>
                 <c:pt idx="11">
-                  <c:v>8.7</c:v>
+                  <c:v>6.6</c:v>
                 </c:pt>
                 <c:pt idx="12">
-                  <c:v>6.4</c:v>
+                  <c:v>4.7</c:v>
                 </c:pt>
                 <c:pt idx="13">
-                  <c:v>6.3</c:v>
+                  <c:v>4.5</c:v>
                 </c:pt>
                 <c:pt idx="14">
-                  <c:v>4.8</c:v>
+                  <c:v>4.1</c:v>
                 </c:pt>
               </c:numCache>
             </c:numRef>
@@ -2261,7 +2261,7 @@
         <c:axId val="2094734552"/>
         <c:scaling>
           <c:orientation val="minMax"/>
-          <c:max val="56"/>
+          <c:max val="54"/>
           <c:min val="0"/>
         </c:scaling>
         <c:delete val="1"/>
@@ -3097,7 +3097,7 @@
               <c:strCache>
                 <c:ptCount val="1"/>
                 <c:pt idx="0">
-                  <c:v>2025 (n=47)</c:v>
+                  <c:v>2025 (n=41)</c:v>
                 </c:pt>
               </c:strCache>
             </c:strRef>
@@ -3174,13 +3174,13 @@
                   <c:v>4</c:v>
                 </c:pt>
                 <c:pt idx="2">
-                  <c:v>15</c:v>
+                  <c:v>12</c:v>
                 </c:pt>
                 <c:pt idx="3">
-                  <c:v>12</c:v>
+                  <c:v>10</c:v>
                 </c:pt>
                 <c:pt idx="4">
-                  <c:v>14</c:v>
+                  <c:v>13</c:v>
                 </c:pt>
                 <c:pt idx="5">
                   <c:v>1</c:v>
@@ -3198,7 +3198,7 @@
               <c:strCache>
                 <c:ptCount val="1"/>
                 <c:pt idx="0">
-                  <c:v>2026 YTD (n=44)</c:v>
+                  <c:v>2026 YTD (n=40)</c:v>
                 </c:pt>
               </c:strCache>
             </c:strRef>
@@ -3275,16 +3275,16 @@
                   <c:v>8</c:v>
                 </c:pt>
                 <c:pt idx="2">
-                  <c:v>10</c:v>
+                  <c:v>8</c:v>
                 </c:pt>
                 <c:pt idx="3">
                   <c:v>9</c:v>
                 </c:pt>
                 <c:pt idx="4">
-                  <c:v>6</c:v>
+                  <c:v>5</c:v>
                 </c:pt>
                 <c:pt idx="5">
-                  <c:v>10</c:v>
+                  <c:v>9</c:v>
                 </c:pt>
               </c:numCache>
             </c:numRef>
@@ -3474,7 +3474,7 @@
               <c:strCache>
                 <c:ptCount val="1"/>
                 <c:pt idx="0">
-                  <c:v>2025 (n=47)</c:v>
+                  <c:v>2025 (n=41)</c:v>
                 </c:pt>
               </c:strCache>
             </c:strRef>
@@ -3551,10 +3551,10 @@
                   <c:v>4</c:v>
                 </c:pt>
                 <c:pt idx="2">
-                  <c:v>14</c:v>
+                  <c:v>11</c:v>
                 </c:pt>
                 <c:pt idx="3">
-                  <c:v>13</c:v>
+                  <c:v>10</c:v>
                 </c:pt>
                 <c:pt idx="4">
                   <c:v>8</c:v>
@@ -3575,7 +3575,7 @@
               <c:strCache>
                 <c:ptCount val="1"/>
                 <c:pt idx="0">
-                  <c:v>2026 YTD (n=44)</c:v>
+                  <c:v>2026 YTD (n=40)</c:v>
                 </c:pt>
               </c:strCache>
             </c:strRef>
@@ -3649,16 +3649,16 @@
                   <c:v>2</c:v>
                 </c:pt>
                 <c:pt idx="1">
-                  <c:v>7</c:v>
+                  <c:v>5</c:v>
                 </c:pt>
                 <c:pt idx="2">
-                  <c:v>15</c:v>
+                  <c:v>14</c:v>
                 </c:pt>
                 <c:pt idx="3">
                   <c:v>6</c:v>
                 </c:pt>
                 <c:pt idx="4">
-                  <c:v>11</c:v>
+                  <c:v>10</c:v>
                 </c:pt>
                 <c:pt idx="5">
                   <c:v>3</c:v>
@@ -5621,6 +5621,45 @@
         </p:nvSpPr>
         <p:spPr>
           <a:xfrm>
+            <a:off x="731520" y="4645152"/>
+            <a:ext cx="9601200" cy="365760"/>
+          </a:xfrm>
+          <a:prstGeom prst="rect">
+            <a:avLst/>
+          </a:prstGeom>
+          <a:noFill/>
+          <a:ln/>
+        </p:spPr>
+        <p:txBody>
+          <a:bodyPr wrap="square" rtlCol="0" anchor="ctr"/>
+          <a:lstStyle/>
+          <a:p>
+            <a:pPr indent="0" marL="0">
+              <a:buNone/>
+            </a:pPr>
+            <a:r>
+              <a:rPr lang="en-US" sz="1200" i="1" dirty="0">
+                <a:solidFill>
+                  <a:srgbClr val="B9C4BD"/>
+                </a:solidFill>
+                <a:latin typeface="Calibri" pitchFamily="34" charset="0"/>
+                <a:ea typeface="Calibri" pitchFamily="34" charset="-122"/>
+                <a:cs typeface="Calibri" pitchFamily="34" charset="-120"/>
+              </a:rPr>
+              <a:t>Reklamace jsou uvedeny bez reklamací optických vad exteriéru a interiéru</a:t>
+            </a:r>
+            <a:endParaRPr lang="en-US" sz="1200" dirty="0"/>
+          </a:p>
+        </p:txBody>
+      </p:sp>
+      <p:sp>
+        <p:nvSpPr>
+          <p:cNvPr id="10" name="Text 8"/>
+          <p:cNvSpPr/>
+          <p:nvPr/>
+        </p:nvSpPr>
+        <p:spPr>
+          <a:xfrm>
             <a:off x="731520" y="6263640"/>
             <a:ext cx="7315200" cy="320040"/>
           </a:xfrm>
@@ -5972,7 +6011,7 @@
                 <a:ea typeface="Calibri" pitchFamily="34" charset="-122"/>
                 <a:cs typeface="Calibri" pitchFamily="34" charset="-120"/>
               </a:rPr>
-              <a:t>Počet reklamací je meziročně podobný (47 vs. 44), ale finanční náklad vzrostl z 36 527 € na 44 750 € (+22 %) a průměrná cena na vůz vzrostla o 71 %.</a:t>
+              <a:t>Počet reklamací (bez optiky) je meziročně podobný (41 vs. 40), ale finanční náklad vzrostl z 34 075 € na 43 767 € (+28 %) a průměrná cena na vůz vzrostla o 79 %.</a:t>
             </a:r>
             <a:endParaRPr lang="en-US" sz="1200" dirty="0"/>
           </a:p>
@@ -6188,7 +6227,7 @@
                 <a:ea typeface="Calibri" pitchFamily="34" charset="-122"/>
                 <a:cs typeface="Calibri" pitchFamily="34" charset="-120"/>
               </a:rPr>
-              <a:t>Reklamace spotřebovávají 50,5 % marže LR+Jaguar za 2025–2026. Ze 14 srovnávaných značek (Mercedes, BMW, Ford, Toyota, Hyundai, Kia, Škoda, VW, Volvo, Mazda, Renault, Peugeot, Citroën, Dacia) se žádná ani nepřiblíží — rozptyl je 4,8–22,6 %.</a:t>
+              <a:t>I bez optických vad spotřebují reklamace 48,4 % marže LR+Jaguar za 2025–2026. Ze 14 srovnávaných značek (Mercedes, BMW, Ford, Toyota, Hyundai, Kia, Škoda, VW, Volvo, Mazda, Renault, Peugeot, Citroën, Dacia) se žádná ani nepřiblíží — rozptyl je 4,1–20,5 %.</a:t>
             </a:r>
             <a:endParaRPr lang="en-US" sz="1200" dirty="0"/>
           </a:p>
@@ -6390,12 +6429,12 @@
         </p:nvSpPr>
         <p:spPr>
           <a:xfrm>
-            <a:off x="548640" y="1600200"/>
-            <a:ext cx="5166360" cy="2103120"/>
+            <a:off x="548640" y="1463040"/>
+            <a:ext cx="5166360" cy="1874520"/>
           </a:xfrm>
           <a:prstGeom prst="roundRect">
             <a:avLst>
-              <a:gd name="adj" fmla="val 3478"/>
+              <a:gd name="adj" fmla="val 3902"/>
             </a:avLst>
           </a:prstGeom>
           <a:solidFill>
@@ -6424,8 +6463,8 @@
         </p:nvSpPr>
         <p:spPr>
           <a:xfrm>
-            <a:off x="822960" y="1874520"/>
-            <a:ext cx="502920" cy="502920"/>
+            <a:off x="804672" y="1700784"/>
+            <a:ext cx="457200" cy="457200"/>
           </a:xfrm>
           <a:prstGeom prst="ellipse">
             <a:avLst/>
@@ -6444,8 +6483,8 @@
         </p:nvSpPr>
         <p:spPr>
           <a:xfrm>
-            <a:off x="822960" y="1874520"/>
-            <a:ext cx="502920" cy="502920"/>
+            <a:off x="804672" y="1700784"/>
+            <a:ext cx="457200" cy="457200"/>
           </a:xfrm>
           <a:prstGeom prst="rect">
             <a:avLst/>
@@ -6461,7 +6500,7 @@
               <a:buNone/>
             </a:pPr>
             <a:r>
-              <a:rPr lang="en-US" sz="2000" b="1" dirty="0">
+              <a:rPr lang="en-US" sz="1800" b="1" dirty="0">
                 <a:solidFill>
                   <a:srgbClr val="E4C878"/>
                 </a:solidFill>
@@ -6471,7 +6510,7 @@
               </a:rPr>
               <a:t>1</a:t>
             </a:r>
-            <a:endParaRPr lang="en-US" sz="2000" dirty="0"/>
+            <a:endParaRPr lang="en-US" sz="1800" dirty="0"/>
           </a:p>
         </p:txBody>
       </p:sp>
@@ -6483,8 +6522,8 @@
         </p:nvSpPr>
         <p:spPr>
           <a:xfrm>
-            <a:off x="1508760" y="1856232"/>
-            <a:ext cx="3931920" cy="548640"/>
+            <a:off x="1444752" y="1682496"/>
+            <a:ext cx="3995928" cy="502920"/>
           </a:xfrm>
           <a:prstGeom prst="rect">
             <a:avLst/>
@@ -6500,7 +6539,7 @@
               <a:buNone/>
             </a:pPr>
             <a:r>
-              <a:rPr lang="en-US" sz="1600" b="1" dirty="0">
+              <a:rPr lang="en-US" sz="1500" b="1" dirty="0">
                 <a:solidFill>
                   <a:srgbClr val="1A1A1A"/>
                 </a:solidFill>
@@ -6510,7 +6549,7 @@
               </a:rPr>
               <a:t>Jedna skupina vozů</a:t>
             </a:r>
-            <a:endParaRPr lang="en-US" sz="1600" dirty="0"/>
+            <a:endParaRPr lang="en-US" sz="1500" dirty="0"/>
           </a:p>
         </p:txBody>
       </p:sp>
@@ -6522,8 +6561,8 @@
         </p:nvSpPr>
         <p:spPr>
           <a:xfrm>
-            <a:off x="822960" y="2514600"/>
-            <a:ext cx="4617720" cy="1005840"/>
+            <a:off x="804672" y="2286000"/>
+            <a:ext cx="4654296" cy="914400"/>
           </a:xfrm>
           <a:prstGeom prst="rect">
             <a:avLst/>
@@ -6537,12 +6576,12 @@
           <a:p>
             <a:pPr indent="0" marL="0">
               <a:lnSpc>
-                <a:spcPct val="115000"/>
+                <a:spcPct val="112000"/>
               </a:lnSpc>
               <a:buNone/>
             </a:pPr>
             <a:r>
-              <a:rPr lang="en-US" sz="1250" dirty="0">
+              <a:rPr lang="en-US" sz="1150" dirty="0">
                 <a:solidFill>
                   <a:srgbClr val="3A3A3A"/>
                 </a:solidFill>
@@ -6552,7 +6591,7 @@
               </a:rPr>
               <a:t>Land Rover a Jaguar jsou v celé analýze sloučené do jedné společné skupiny — nikde nejsou rozdělené po značkách.</a:t>
             </a:r>
-            <a:endParaRPr lang="en-US" sz="1250" dirty="0"/>
+            <a:endParaRPr lang="en-US" sz="1150" dirty="0"/>
           </a:p>
         </p:txBody>
       </p:sp>
@@ -6564,12 +6603,12 @@
         </p:nvSpPr>
         <p:spPr>
           <a:xfrm>
-            <a:off x="6035040" y="1600200"/>
-            <a:ext cx="5166360" cy="2103120"/>
+            <a:off x="6035040" y="1463040"/>
+            <a:ext cx="5166360" cy="1874520"/>
           </a:xfrm>
           <a:prstGeom prst="roundRect">
             <a:avLst>
-              <a:gd name="adj" fmla="val 3478"/>
+              <a:gd name="adj" fmla="val 3902"/>
             </a:avLst>
           </a:prstGeom>
           <a:solidFill>
@@ -6598,8 +6637,8 @@
         </p:nvSpPr>
         <p:spPr>
           <a:xfrm>
-            <a:off x="6309360" y="1874520"/>
-            <a:ext cx="502920" cy="502920"/>
+            <a:off x="6291072" y="1700784"/>
+            <a:ext cx="457200" cy="457200"/>
           </a:xfrm>
           <a:prstGeom prst="ellipse">
             <a:avLst/>
@@ -6618,8 +6657,8 @@
         </p:nvSpPr>
         <p:spPr>
           <a:xfrm>
-            <a:off x="6309360" y="1874520"/>
-            <a:ext cx="502920" cy="502920"/>
+            <a:off x="6291072" y="1700784"/>
+            <a:ext cx="457200" cy="457200"/>
           </a:xfrm>
           <a:prstGeom prst="rect">
             <a:avLst/>
@@ -6635,7 +6674,7 @@
               <a:buNone/>
             </a:pPr>
             <a:r>
-              <a:rPr lang="en-US" sz="2000" b="1" dirty="0">
+              <a:rPr lang="en-US" sz="1800" b="1" dirty="0">
                 <a:solidFill>
                   <a:srgbClr val="E4C878"/>
                 </a:solidFill>
@@ -6645,7 +6684,7 @@
               </a:rPr>
               <a:t>2</a:t>
             </a:r>
-            <a:endParaRPr lang="en-US" sz="2000" dirty="0"/>
+            <a:endParaRPr lang="en-US" sz="1800" dirty="0"/>
           </a:p>
         </p:txBody>
       </p:sp>
@@ -6657,8 +6696,8 @@
         </p:nvSpPr>
         <p:spPr>
           <a:xfrm>
-            <a:off x="6995160" y="1856232"/>
-            <a:ext cx="3931920" cy="548640"/>
+            <a:off x="6931152" y="1682496"/>
+            <a:ext cx="3995928" cy="502920"/>
           </a:xfrm>
           <a:prstGeom prst="rect">
             <a:avLst/>
@@ -6674,7 +6713,7 @@
               <a:buNone/>
             </a:pPr>
             <a:r>
-              <a:rPr lang="en-US" sz="1600" b="1" dirty="0">
+              <a:rPr lang="en-US" sz="1500" b="1" dirty="0">
                 <a:solidFill>
                   <a:srgbClr val="1A1A1A"/>
                 </a:solidFill>
@@ -6684,7 +6723,7 @@
               </a:rPr>
               <a:t>„Prodáno“ = Car Purchase Done</a:t>
             </a:r>
-            <a:endParaRPr lang="en-US" sz="1600" dirty="0"/>
+            <a:endParaRPr lang="en-US" sz="1500" dirty="0"/>
           </a:p>
         </p:txBody>
       </p:sp>
@@ -6696,8 +6735,8 @@
         </p:nvSpPr>
         <p:spPr>
           <a:xfrm>
-            <a:off x="6309360" y="2514600"/>
-            <a:ext cx="4617720" cy="1005840"/>
+            <a:off x="6291072" y="2286000"/>
+            <a:ext cx="4654296" cy="914400"/>
           </a:xfrm>
           <a:prstGeom prst="rect">
             <a:avLst/>
@@ -6711,12 +6750,12 @@
           <a:p>
             <a:pPr indent="0" marL="0">
               <a:lnSpc>
-                <a:spcPct val="115000"/>
+                <a:spcPct val="112000"/>
               </a:lnSpc>
               <a:buNone/>
             </a:pPr>
             <a:r>
-              <a:rPr lang="en-US" sz="1250" dirty="0">
+              <a:rPr lang="en-US" sz="1150" dirty="0">
                 <a:solidFill>
                   <a:srgbClr val="3A3A3A"/>
                 </a:solidFill>
@@ -6726,7 +6765,7 @@
               </a:rPr>
               <a:t>Vůz je počítán jako prodaný v okamžiku, kdy ho Carvago reálně nakoupilo od dealera (vyplněné datum platby dealerovi). Nezáleží na tom, zda už byl fyzicky předán zákazníkovi.</a:t>
             </a:r>
-            <a:endParaRPr lang="en-US" sz="1250" dirty="0"/>
+            <a:endParaRPr lang="en-US" sz="1150" dirty="0"/>
           </a:p>
         </p:txBody>
       </p:sp>
@@ -6738,12 +6777,12 @@
         </p:nvSpPr>
         <p:spPr>
           <a:xfrm>
-            <a:off x="548640" y="3931920"/>
-            <a:ext cx="5166360" cy="2103120"/>
+            <a:off x="548640" y="3520440"/>
+            <a:ext cx="5166360" cy="1874520"/>
           </a:xfrm>
           <a:prstGeom prst="roundRect">
             <a:avLst>
-              <a:gd name="adj" fmla="val 3478"/>
+              <a:gd name="adj" fmla="val 3902"/>
             </a:avLst>
           </a:prstGeom>
           <a:solidFill>
@@ -6772,8 +6811,8 @@
         </p:nvSpPr>
         <p:spPr>
           <a:xfrm>
-            <a:off x="822960" y="4206240"/>
-            <a:ext cx="502920" cy="502920"/>
+            <a:off x="804672" y="3758184"/>
+            <a:ext cx="457200" cy="457200"/>
           </a:xfrm>
           <a:prstGeom prst="ellipse">
             <a:avLst/>
@@ -6792,8 +6831,8 @@
         </p:nvSpPr>
         <p:spPr>
           <a:xfrm>
-            <a:off x="822960" y="4206240"/>
-            <a:ext cx="502920" cy="502920"/>
+            <a:off x="804672" y="3758184"/>
+            <a:ext cx="457200" cy="457200"/>
           </a:xfrm>
           <a:prstGeom prst="rect">
             <a:avLst/>
@@ -6809,7 +6848,7 @@
               <a:buNone/>
             </a:pPr>
             <a:r>
-              <a:rPr lang="en-US" sz="2000" b="1" dirty="0">
+              <a:rPr lang="en-US" sz="1800" b="1" dirty="0">
                 <a:solidFill>
                   <a:srgbClr val="E4C878"/>
                 </a:solidFill>
@@ -6819,7 +6858,7 @@
               </a:rPr>
               <a:t>3</a:t>
             </a:r>
-            <a:endParaRPr lang="en-US" sz="2000" dirty="0"/>
+            <a:endParaRPr lang="en-US" sz="1800" dirty="0"/>
           </a:p>
         </p:txBody>
       </p:sp>
@@ -6831,8 +6870,8 @@
         </p:nvSpPr>
         <p:spPr>
           <a:xfrm>
-            <a:off x="1508760" y="4187952"/>
-            <a:ext cx="3931920" cy="548640"/>
+            <a:off x="1444752" y="3739896"/>
+            <a:ext cx="3995928" cy="502920"/>
           </a:xfrm>
           <a:prstGeom prst="rect">
             <a:avLst/>
@@ -6848,7 +6887,7 @@
               <a:buNone/>
             </a:pPr>
             <a:r>
-              <a:rPr lang="en-US" sz="1600" b="1" dirty="0">
+              <a:rPr lang="en-US" sz="1500" b="1" dirty="0">
                 <a:solidFill>
                   <a:srgbClr val="1A1A1A"/>
                 </a:solidFill>
@@ -6858,7 +6897,7 @@
               </a:rPr>
               <a:t>Reklamace = vznikly v daném roce</a:t>
             </a:r>
-            <a:endParaRPr lang="en-US" sz="1600" dirty="0"/>
+            <a:endParaRPr lang="en-US" sz="1500" dirty="0"/>
           </a:p>
         </p:txBody>
       </p:sp>
@@ -6870,8 +6909,8 @@
         </p:nvSpPr>
         <p:spPr>
           <a:xfrm>
-            <a:off x="822960" y="4846320"/>
-            <a:ext cx="4617720" cy="1005840"/>
+            <a:off x="804672" y="4343400"/>
+            <a:ext cx="4654296" cy="914400"/>
           </a:xfrm>
           <a:prstGeom prst="rect">
             <a:avLst/>
@@ -6885,12 +6924,12 @@
           <a:p>
             <a:pPr indent="0" marL="0">
               <a:lnSpc>
-                <a:spcPct val="115000"/>
+                <a:spcPct val="112000"/>
               </a:lnSpc>
               <a:buNone/>
             </a:pPr>
             <a:r>
-              <a:rPr lang="en-US" sz="1250" dirty="0">
+              <a:rPr lang="en-US" sz="1150" dirty="0">
                 <a:solidFill>
                   <a:srgbClr val="3A3A3A"/>
                 </a:solidFill>
@@ -6900,7 +6939,7 @@
               </a:rPr>
               <a:t>Počítáme reklamace podle data jejich vzniku (rok 2025 / 2026) na vozech Land Rover a Jaguar — nezávisle na tom, kdy byl konkrétní vůz nakoupen.</a:t>
             </a:r>
-            <a:endParaRPr lang="en-US" sz="1250" dirty="0"/>
+            <a:endParaRPr lang="en-US" sz="1150" dirty="0"/>
           </a:p>
         </p:txBody>
       </p:sp>
@@ -6912,12 +6951,12 @@
         </p:nvSpPr>
         <p:spPr>
           <a:xfrm>
-            <a:off x="6035040" y="3931920"/>
-            <a:ext cx="5166360" cy="2103120"/>
+            <a:off x="6035040" y="3520440"/>
+            <a:ext cx="5166360" cy="1874520"/>
           </a:xfrm>
           <a:prstGeom prst="roundRect">
             <a:avLst>
-              <a:gd name="adj" fmla="val 3478"/>
+              <a:gd name="adj" fmla="val 3902"/>
             </a:avLst>
           </a:prstGeom>
           <a:solidFill>
@@ -6946,8 +6985,8 @@
         </p:nvSpPr>
         <p:spPr>
           <a:xfrm>
-            <a:off x="6309360" y="4206240"/>
-            <a:ext cx="502920" cy="502920"/>
+            <a:off x="6291072" y="3758184"/>
+            <a:ext cx="457200" cy="457200"/>
           </a:xfrm>
           <a:prstGeom prst="ellipse">
             <a:avLst/>
@@ -6966,8 +7005,8 @@
         </p:nvSpPr>
         <p:spPr>
           <a:xfrm>
-            <a:off x="6309360" y="4206240"/>
-            <a:ext cx="502920" cy="502920"/>
+            <a:off x="6291072" y="3758184"/>
+            <a:ext cx="457200" cy="457200"/>
           </a:xfrm>
           <a:prstGeom prst="rect">
             <a:avLst/>
@@ -6983,7 +7022,7 @@
               <a:buNone/>
             </a:pPr>
             <a:r>
-              <a:rPr lang="en-US" sz="2000" b="1" dirty="0">
+              <a:rPr lang="en-US" sz="1800" b="1" dirty="0">
                 <a:solidFill>
                   <a:srgbClr val="E4C878"/>
                 </a:solidFill>
@@ -6993,7 +7032,7 @@
               </a:rPr>
               <a:t>4</a:t>
             </a:r>
-            <a:endParaRPr lang="en-US" sz="2000" dirty="0"/>
+            <a:endParaRPr lang="en-US" sz="1800" dirty="0"/>
           </a:p>
         </p:txBody>
       </p:sp>
@@ -7005,8 +7044,8 @@
         </p:nvSpPr>
         <p:spPr>
           <a:xfrm>
-            <a:off x="6995160" y="4187952"/>
-            <a:ext cx="3931920" cy="548640"/>
+            <a:off x="6931152" y="3739896"/>
+            <a:ext cx="3995928" cy="502920"/>
           </a:xfrm>
           <a:prstGeom prst="rect">
             <a:avLst/>
@@ -7022,7 +7061,7 @@
               <a:buNone/>
             </a:pPr>
             <a:r>
-              <a:rPr lang="en-US" sz="1600" b="1" dirty="0">
+              <a:rPr lang="en-US" sz="1500" b="1" dirty="0">
                 <a:solidFill>
                   <a:srgbClr val="1A1A1A"/>
                 </a:solidFill>
@@ -7032,7 +7071,7 @@
               </a:rPr>
               <a:t>Cena reklamace: skutečná, nebo predikce</a:t>
             </a:r>
-            <a:endParaRPr lang="en-US" sz="1600" dirty="0"/>
+            <a:endParaRPr lang="en-US" sz="1500" dirty="0"/>
           </a:p>
         </p:txBody>
       </p:sp>
@@ -7044,8 +7083,8 @@
         </p:nvSpPr>
         <p:spPr>
           <a:xfrm>
-            <a:off x="6309360" y="4846320"/>
-            <a:ext cx="4617720" cy="1005840"/>
+            <a:off x="6291072" y="4343400"/>
+            <a:ext cx="4654296" cy="914400"/>
           </a:xfrm>
           <a:prstGeom prst="rect">
             <a:avLst/>
@@ -7059,12 +7098,12 @@
           <a:p>
             <a:pPr indent="0" marL="0">
               <a:lnSpc>
-                <a:spcPct val="115000"/>
+                <a:spcPct val="112000"/>
               </a:lnSpc>
               <a:buNone/>
             </a:pPr>
             <a:r>
-              <a:rPr lang="en-US" sz="1250" dirty="0">
+              <a:rPr lang="en-US" sz="1150" dirty="0">
                 <a:solidFill>
                   <a:srgbClr val="3A3A3A"/>
                 </a:solidFill>
@@ -7074,20 +7113,67 @@
               </a:rPr>
               <a:t>Pokud reklamace ještě není uzavřená, používáme nejlepší dostupný odhad nákladu (predikci) — jinak reálně vyfakturovanou částku.</a:t>
             </a:r>
-            <a:endParaRPr lang="en-US" sz="1250" dirty="0"/>
-          </a:p>
-        </p:txBody>
-      </p:sp>
-      <p:sp>
-        <p:nvSpPr>
-          <p:cNvPr id="24" name="Text 22"/>
-          <p:cNvSpPr/>
-          <p:nvPr/>
-        </p:nvSpPr>
-        <p:spPr>
-          <a:xfrm>
-            <a:off x="457200" y="6537960"/>
-            <a:ext cx="8229600" cy="274320"/>
+            <a:endParaRPr lang="en-US" sz="1150" dirty="0"/>
+          </a:p>
+        </p:txBody>
+      </p:sp>
+      <p:sp>
+        <p:nvSpPr>
+          <p:cNvPr id="24" name="Shape 22"/>
+          <p:cNvSpPr/>
+          <p:nvPr/>
+        </p:nvSpPr>
+        <p:spPr>
+          <a:xfrm>
+            <a:off x="548640" y="5532120"/>
+            <a:ext cx="10652760" cy="841248"/>
+          </a:xfrm>
+          <a:prstGeom prst="roundRect">
+            <a:avLst>
+              <a:gd name="adj" fmla="val 8696"/>
+            </a:avLst>
+          </a:prstGeom>
+          <a:solidFill>
+            <a:srgbClr val="FBF3E3"/>
+          </a:solidFill>
+          <a:ln w="19050">
+            <a:solidFill>
+              <a:srgbClr val="C9A64A"/>
+            </a:solidFill>
+            <a:prstDash val="solid"/>
+          </a:ln>
+        </p:spPr>
+      </p:sp>
+      <p:sp>
+        <p:nvSpPr>
+          <p:cNvPr id="25" name="Shape 23"/>
+          <p:cNvSpPr/>
+          <p:nvPr/>
+        </p:nvSpPr>
+        <p:spPr>
+          <a:xfrm>
+            <a:off x="804672" y="5724144"/>
+            <a:ext cx="457200" cy="457200"/>
+          </a:xfrm>
+          <a:prstGeom prst="ellipse">
+            <a:avLst/>
+          </a:prstGeom>
+          <a:solidFill>
+            <a:srgbClr val="C9A64A"/>
+          </a:solidFill>
+          <a:ln/>
+        </p:spPr>
+      </p:sp>
+      <p:sp>
+        <p:nvSpPr>
+          <p:cNvPr id="26" name="Text 24"/>
+          <p:cNvSpPr/>
+          <p:nvPr/>
+        </p:nvSpPr>
+        <p:spPr>
+          <a:xfrm>
+            <a:off x="804672" y="5724144"/>
+            <a:ext cx="457200" cy="457200"/>
           </a:xfrm>
           <a:prstGeom prst="rect">
             <a:avLst/>
@@ -7099,18 +7185,138 @@
           <a:bodyPr wrap="square" rtlCol="0" anchor="ctr"/>
           <a:lstStyle/>
           <a:p>
-            <a:pPr algn="l" indent="0" marL="0">
-              <a:buNone/>
-            </a:pPr>
-            <a:r>
-              <a:rPr lang="en-US" sz="900" dirty="0">
-                <a:solidFill>
-                  <a:srgbClr val="6B6B6B"/>
+            <a:pPr algn="ctr" indent="0" marL="0">
+              <a:buNone/>
+            </a:pPr>
+            <a:r>
+              <a:rPr lang="en-US" sz="1800" b="1" dirty="0">
+                <a:solidFill>
+                  <a:srgbClr val="13291F"/>
+                </a:solidFill>
+                <a:latin typeface="Cambria" pitchFamily="34" charset="0"/>
+                <a:ea typeface="Cambria" pitchFamily="34" charset="-122"/>
+                <a:cs typeface="Cambria" pitchFamily="34" charset="-120"/>
+              </a:rPr>
+              <a:t>5</a:t>
+            </a:r>
+            <a:endParaRPr lang="en-US" sz="1800" dirty="0"/>
+          </a:p>
+        </p:txBody>
+      </p:sp>
+      <p:sp>
+        <p:nvSpPr>
+          <p:cNvPr id="27" name="Text 25"/>
+          <p:cNvSpPr/>
+          <p:nvPr/>
+        </p:nvSpPr>
+        <p:spPr>
+          <a:xfrm>
+            <a:off x="1444752" y="5623560"/>
+            <a:ext cx="9482328" cy="320040"/>
+          </a:xfrm>
+          <a:prstGeom prst="rect">
+            <a:avLst/>
+          </a:prstGeom>
+          <a:noFill/>
+          <a:ln/>
+        </p:spPr>
+        <p:txBody>
+          <a:bodyPr wrap="square" rtlCol="0" anchor="ctr"/>
+          <a:lstStyle/>
+          <a:p>
+            <a:pPr indent="0" marL="0">
+              <a:buNone/>
+            </a:pPr>
+            <a:r>
+              <a:rPr lang="en-US" sz="1450" b="1" dirty="0">
+                <a:solidFill>
+                  <a:srgbClr val="8A5A00"/>
+                </a:solidFill>
+                <a:latin typeface="Cambria" pitchFamily="34" charset="0"/>
+                <a:ea typeface="Cambria" pitchFamily="34" charset="-122"/>
+                <a:cs typeface="Cambria" pitchFamily="34" charset="-120"/>
+              </a:rPr>
+              <a:t>Bez optických vad exteriéru a interiéru</a:t>
+            </a:r>
+            <a:endParaRPr lang="en-US" sz="1450" dirty="0"/>
+          </a:p>
+        </p:txBody>
+      </p:sp>
+      <p:sp>
+        <p:nvSpPr>
+          <p:cNvPr id="28" name="Text 26"/>
+          <p:cNvSpPr/>
+          <p:nvPr/>
+        </p:nvSpPr>
+        <p:spPr>
+          <a:xfrm>
+            <a:off x="1444752" y="5916168"/>
+            <a:ext cx="9482328" cy="420624"/>
+          </a:xfrm>
+          <a:prstGeom prst="rect">
+            <a:avLst/>
+          </a:prstGeom>
+          <a:noFill/>
+          <a:ln/>
+        </p:spPr>
+        <p:txBody>
+          <a:bodyPr wrap="square" rtlCol="0" anchor="t"/>
+          <a:lstStyle/>
+          <a:p>
+            <a:pPr indent="0" marL="0">
+              <a:lnSpc>
+                <a:spcPct val="105000"/>
+              </a:lnSpc>
+              <a:buNone/>
+            </a:pPr>
+            <a:r>
+              <a:rPr lang="en-US" sz="1000" dirty="0">
+                <a:solidFill>
+                  <a:srgbClr val="3A3A3A"/>
                 </a:solidFill>
                 <a:latin typeface="Calibri" pitchFamily="34" charset="0"/>
                 <a:ea typeface="Calibri" pitchFamily="34" charset="-122"/>
                 <a:cs typeface="Calibri" pitchFamily="34" charset="-120"/>
               </a:rPr>
+              <a:t>Ve všech číslech jsou vyloučeny reklamace čistě optických vad (kategorie „Exterior – Cosmetics“ a „Interior“). Reklamace kombinující optickou a jinou vadu zůstávají v počtu — jen optická část mizí z nákladu. Stejný filtr platí i pro srovnání s ostatními značkami.</a:t>
+            </a:r>
+            <a:endParaRPr lang="en-US" sz="1000" dirty="0"/>
+          </a:p>
+        </p:txBody>
+      </p:sp>
+      <p:sp>
+        <p:nvSpPr>
+          <p:cNvPr id="29" name="Text 27"/>
+          <p:cNvSpPr/>
+          <p:nvPr/>
+        </p:nvSpPr>
+        <p:spPr>
+          <a:xfrm>
+            <a:off x="457200" y="6537960"/>
+            <a:ext cx="8229600" cy="274320"/>
+          </a:xfrm>
+          <a:prstGeom prst="rect">
+            <a:avLst/>
+          </a:prstGeom>
+          <a:noFill/>
+          <a:ln/>
+        </p:spPr>
+        <p:txBody>
+          <a:bodyPr wrap="square" rtlCol="0" anchor="ctr"/>
+          <a:lstStyle/>
+          <a:p>
+            <a:pPr algn="l" indent="0" marL="0">
+              <a:buNone/>
+            </a:pPr>
+            <a:r>
+              <a:rPr lang="en-US" sz="900" dirty="0">
+                <a:solidFill>
+                  <a:srgbClr val="6B6B6B"/>
+                </a:solidFill>
+                <a:latin typeface="Calibri" pitchFamily="34" charset="0"/>
+                <a:ea typeface="Calibri" pitchFamily="34" charset="-122"/>
+                <a:cs typeface="Calibri" pitchFamily="34" charset="-120"/>
+              </a:rPr>
               <a:t>Carvago  |  Land Rover &amp; Jaguar — Prodeje a reklamace 2025–2026</a:t>
             </a:r>
             <a:endParaRPr lang="en-US" sz="900" dirty="0"/>
@@ -7119,7 +7325,7 @@
       </p:sp>
       <p:sp>
         <p:nvSpPr>
-          <p:cNvPr id="25" name="Text 23"/>
+          <p:cNvPr id="30" name="Text 28"/>
           <p:cNvSpPr/>
           <p:nvPr/>
         </p:nvSpPr>
@@ -7778,12 +7984,12 @@
         </p:nvSpPr>
         <p:spPr>
           <a:xfrm>
-            <a:off x="548640" y="1691640"/>
-            <a:ext cx="5349240" cy="4480560"/>
+            <a:off x="548640" y="1645920"/>
+            <a:ext cx="5349240" cy="4343400"/>
           </a:xfrm>
           <a:prstGeom prst="roundRect">
             <a:avLst>
-              <a:gd name="adj" fmla="val 1633"/>
+              <a:gd name="adj" fmla="val 1684"/>
             </a:avLst>
           </a:prstGeom>
           <a:solidFill>
@@ -7812,7 +8018,7 @@
         </p:nvSpPr>
         <p:spPr>
           <a:xfrm>
-            <a:off x="822960" y="1892808"/>
+            <a:off x="822960" y="1847088"/>
             <a:ext cx="4800600" cy="457200"/>
           </a:xfrm>
           <a:prstGeom prst="rect">
@@ -7851,7 +8057,7 @@
         </p:nvSpPr>
         <p:spPr>
           <a:xfrm>
-            <a:off x="822960" y="2313432"/>
+            <a:off x="822960" y="2267712"/>
             <a:ext cx="1828800" cy="868680"/>
           </a:xfrm>
           <a:prstGeom prst="rect">
@@ -7876,7 +8082,7 @@
                 <a:ea typeface="Cambria" pitchFamily="34" charset="-122"/>
                 <a:cs typeface="Cambria" pitchFamily="34" charset="-120"/>
               </a:rPr>
-              <a:t>47</a:t>
+              <a:t>41</a:t>
             </a:r>
             <a:endParaRPr lang="en-US" sz="4400" dirty="0"/>
           </a:p>
@@ -7890,7 +8096,7 @@
         </p:nvSpPr>
         <p:spPr>
           <a:xfrm>
-            <a:off x="822960" y="3108960"/>
+            <a:off x="822960" y="3063240"/>
             <a:ext cx="2103120" cy="320040"/>
           </a:xfrm>
           <a:prstGeom prst="rect">
@@ -7929,7 +8135,7 @@
         </p:nvSpPr>
         <p:spPr>
           <a:xfrm>
-            <a:off x="2834640" y="2350008"/>
+            <a:off x="2834640" y="2304288"/>
             <a:ext cx="2788920" cy="256032"/>
           </a:xfrm>
           <a:prstGeom prst="rect">
@@ -7954,7 +8160,7 @@
                 <a:ea typeface="Calibri" pitchFamily="34" charset="-122"/>
                 <a:cs typeface="Calibri" pitchFamily="34" charset="-120"/>
               </a:rPr>
-              <a:t>Interní: 20</a:t>
+              <a:t>Interní: 14</a:t>
             </a:r>
             <a:endParaRPr lang="en-US" sz="1150" dirty="0"/>
           </a:p>
@@ -7968,8 +8174,8 @@
         </p:nvSpPr>
         <p:spPr>
           <a:xfrm>
-            <a:off x="2834640" y="2606040"/>
-            <a:ext cx="2065867" cy="201168"/>
+            <a:off x="2834640" y="2560320"/>
+            <a:ext cx="1446107" cy="201168"/>
           </a:xfrm>
           <a:prstGeom prst="rect">
             <a:avLst/>
@@ -7988,7 +8194,7 @@
         </p:nvSpPr>
         <p:spPr>
           <a:xfrm>
-            <a:off x="2834640" y="2916936"/>
+            <a:off x="2834640" y="2871216"/>
             <a:ext cx="2788920" cy="256032"/>
           </a:xfrm>
           <a:prstGeom prst="rect">
@@ -8027,7 +8233,7 @@
         </p:nvSpPr>
         <p:spPr>
           <a:xfrm>
-            <a:off x="2834640" y="3172968"/>
+            <a:off x="2834640" y="3127248"/>
             <a:ext cx="2788920" cy="201168"/>
           </a:xfrm>
           <a:prstGeom prst="rect">
@@ -8047,7 +8253,7 @@
         </p:nvSpPr>
         <p:spPr>
           <a:xfrm>
-            <a:off x="822960" y="3657600"/>
+            <a:off x="822960" y="3611880"/>
             <a:ext cx="4800600" cy="0"/>
           </a:xfrm>
           <a:prstGeom prst="line">
@@ -8070,7 +8276,7 @@
         </p:nvSpPr>
         <p:spPr>
           <a:xfrm>
-            <a:off x="822960" y="3840480"/>
+            <a:off x="822960" y="3794760"/>
             <a:ext cx="4800600" cy="292608"/>
           </a:xfrm>
           <a:prstGeom prst="rect">
@@ -8109,7 +8315,7 @@
         </p:nvSpPr>
         <p:spPr>
           <a:xfrm>
-            <a:off x="822960" y="4133088"/>
+            <a:off x="822960" y="4087368"/>
             <a:ext cx="4800600" cy="365760"/>
           </a:xfrm>
           <a:prstGeom prst="rect">
@@ -8134,7 +8340,7 @@
                 <a:ea typeface="Cambria" pitchFamily="34" charset="-122"/>
                 <a:cs typeface="Cambria" pitchFamily="34" charset="-120"/>
               </a:rPr>
-              <a:t>890 529 Kč  /  36 527 €</a:t>
+              <a:t>830 760 Kč  /  34 075 €</a:t>
             </a:r>
             <a:endParaRPr lang="en-US" sz="1550" dirty="0"/>
           </a:p>
@@ -8148,7 +8354,7 @@
         </p:nvSpPr>
         <p:spPr>
           <a:xfrm>
-            <a:off x="822960" y="4590288"/>
+            <a:off x="822960" y="4544568"/>
             <a:ext cx="4800600" cy="292608"/>
           </a:xfrm>
           <a:prstGeom prst="rect">
@@ -8187,7 +8393,7 @@
         </p:nvSpPr>
         <p:spPr>
           <a:xfrm>
-            <a:off x="822960" y="4882896"/>
+            <a:off x="822960" y="4837176"/>
             <a:ext cx="4800600" cy="365760"/>
           </a:xfrm>
           <a:prstGeom prst="rect">
@@ -8212,7 +8418,7 @@
                 <a:ea typeface="Cambria" pitchFamily="34" charset="-122"/>
                 <a:cs typeface="Cambria" pitchFamily="34" charset="-120"/>
               </a:rPr>
-              <a:t>18 947 Kč / 777 €</a:t>
+              <a:t>20 262 Kč / 831 €</a:t>
             </a:r>
             <a:endParaRPr lang="en-US" sz="1550" dirty="0"/>
           </a:p>
@@ -8226,7 +8432,7 @@
         </p:nvSpPr>
         <p:spPr>
           <a:xfrm>
-            <a:off x="822960" y="5340096"/>
+            <a:off x="822960" y="5294376"/>
             <a:ext cx="4800600" cy="292608"/>
           </a:xfrm>
           <a:prstGeom prst="rect">
@@ -8265,7 +8471,7 @@
         </p:nvSpPr>
         <p:spPr>
           <a:xfrm>
-            <a:off x="822960" y="5632704"/>
+            <a:off x="822960" y="5586984"/>
             <a:ext cx="4800600" cy="365760"/>
           </a:xfrm>
           <a:prstGeom prst="rect">
@@ -8290,7 +8496,7 @@
                 <a:ea typeface="Cambria" pitchFamily="34" charset="-122"/>
                 <a:cs typeface="Cambria" pitchFamily="34" charset="-120"/>
               </a:rPr>
-              <a:t>19 359 Kč / 794 €</a:t>
+              <a:t>18 060 Kč / 741 €</a:t>
             </a:r>
             <a:endParaRPr lang="en-US" sz="1550" dirty="0"/>
           </a:p>
@@ -8304,12 +8510,12 @@
         </p:nvSpPr>
         <p:spPr>
           <a:xfrm>
-            <a:off x="6263640" y="1691640"/>
-            <a:ext cx="5349240" cy="4480560"/>
+            <a:off x="6263640" y="1645920"/>
+            <a:ext cx="5349240" cy="4343400"/>
           </a:xfrm>
           <a:prstGeom prst="roundRect">
             <a:avLst>
-              <a:gd name="adj" fmla="val 1633"/>
+              <a:gd name="adj" fmla="val 1684"/>
             </a:avLst>
           </a:prstGeom>
           <a:solidFill>
@@ -8338,7 +8544,7 @@
         </p:nvSpPr>
         <p:spPr>
           <a:xfrm>
-            <a:off x="6537960" y="1892808"/>
+            <a:off x="6537960" y="1847088"/>
             <a:ext cx="4800600" cy="457200"/>
           </a:xfrm>
           <a:prstGeom prst="rect">
@@ -8377,7 +8583,7 @@
         </p:nvSpPr>
         <p:spPr>
           <a:xfrm>
-            <a:off x="6537960" y="2313432"/>
+            <a:off x="6537960" y="2267712"/>
             <a:ext cx="1828800" cy="868680"/>
           </a:xfrm>
           <a:prstGeom prst="rect">
@@ -8402,7 +8608,7 @@
                 <a:ea typeface="Cambria" pitchFamily="34" charset="-122"/>
                 <a:cs typeface="Cambria" pitchFamily="34" charset="-120"/>
               </a:rPr>
-              <a:t>44</a:t>
+              <a:t>40</a:t>
             </a:r>
             <a:endParaRPr lang="en-US" sz="4400" dirty="0"/>
           </a:p>
@@ -8416,7 +8622,7 @@
         </p:nvSpPr>
         <p:spPr>
           <a:xfrm>
-            <a:off x="6537960" y="3108960"/>
+            <a:off x="6537960" y="3063240"/>
             <a:ext cx="2103120" cy="320040"/>
           </a:xfrm>
           <a:prstGeom prst="rect">
@@ -8455,7 +8661,7 @@
         </p:nvSpPr>
         <p:spPr>
           <a:xfrm>
-            <a:off x="8549640" y="2350008"/>
+            <a:off x="8549640" y="2304288"/>
             <a:ext cx="2788920" cy="256032"/>
           </a:xfrm>
           <a:prstGeom prst="rect">
@@ -8480,7 +8686,7 @@
                 <a:ea typeface="Calibri" pitchFamily="34" charset="-122"/>
                 <a:cs typeface="Calibri" pitchFamily="34" charset="-120"/>
               </a:rPr>
-              <a:t>Interní: 15</a:t>
+              <a:t>Interní: 12</a:t>
             </a:r>
             <a:endParaRPr lang="en-US" sz="1150" dirty="0"/>
           </a:p>
@@ -8494,8 +8700,8 @@
         </p:nvSpPr>
         <p:spPr>
           <a:xfrm>
-            <a:off x="8549640" y="2606040"/>
-            <a:ext cx="1442545" cy="201168"/>
+            <a:off x="8549640" y="2560320"/>
+            <a:ext cx="1195251" cy="201168"/>
           </a:xfrm>
           <a:prstGeom prst="rect">
             <a:avLst/>
@@ -8514,7 +8720,7 @@
         </p:nvSpPr>
         <p:spPr>
           <a:xfrm>
-            <a:off x="8549640" y="2916936"/>
+            <a:off x="8549640" y="2871216"/>
             <a:ext cx="2788920" cy="256032"/>
           </a:xfrm>
           <a:prstGeom prst="rect">
@@ -8539,7 +8745,7 @@
                 <a:ea typeface="Calibri" pitchFamily="34" charset="-122"/>
                 <a:cs typeface="Calibri" pitchFamily="34" charset="-120"/>
               </a:rPr>
-              <a:t>Externí: 29</a:t>
+              <a:t>Externí: 28</a:t>
             </a:r>
             <a:endParaRPr lang="en-US" sz="1150" dirty="0"/>
           </a:p>
@@ -8553,7 +8759,7 @@
         </p:nvSpPr>
         <p:spPr>
           <a:xfrm>
-            <a:off x="8549640" y="3172968"/>
+            <a:off x="8549640" y="3127248"/>
             <a:ext cx="2788920" cy="201168"/>
           </a:xfrm>
           <a:prstGeom prst="rect">
@@ -8573,7 +8779,7 @@
         </p:nvSpPr>
         <p:spPr>
           <a:xfrm>
-            <a:off x="6537960" y="3657600"/>
+            <a:off x="6537960" y="3611880"/>
             <a:ext cx="4800600" cy="0"/>
           </a:xfrm>
           <a:prstGeom prst="line">
@@ -8596,7 +8802,7 @@
         </p:nvSpPr>
         <p:spPr>
           <a:xfrm>
-            <a:off x="6537960" y="3840480"/>
+            <a:off x="6537960" y="3794760"/>
             <a:ext cx="4800600" cy="292608"/>
           </a:xfrm>
           <a:prstGeom prst="rect">
@@ -8635,7 +8841,7 @@
         </p:nvSpPr>
         <p:spPr>
           <a:xfrm>
-            <a:off x="6537960" y="4133088"/>
+            <a:off x="6537960" y="4087368"/>
             <a:ext cx="4800600" cy="365760"/>
           </a:xfrm>
           <a:prstGeom prst="rect">
@@ -8660,7 +8866,7 @@
                 <a:ea typeface="Cambria" pitchFamily="34" charset="-122"/>
                 <a:cs typeface="Cambria" pitchFamily="34" charset="-120"/>
               </a:rPr>
-              <a:t>1 086 721 Kč  /  44 750 €</a:t>
+              <a:t>1 062 775 Kč  /  43 767 €</a:t>
             </a:r>
             <a:endParaRPr lang="en-US" sz="1550" dirty="0"/>
           </a:p>
@@ -8674,7 +8880,7 @@
         </p:nvSpPr>
         <p:spPr>
           <a:xfrm>
-            <a:off x="6537960" y="4590288"/>
+            <a:off x="6537960" y="4544568"/>
             <a:ext cx="4800600" cy="292608"/>
           </a:xfrm>
           <a:prstGeom prst="rect">
@@ -8713,7 +8919,7 @@
         </p:nvSpPr>
         <p:spPr>
           <a:xfrm>
-            <a:off x="6537960" y="4882896"/>
+            <a:off x="6537960" y="4837176"/>
             <a:ext cx="4800600" cy="365760"/>
           </a:xfrm>
           <a:prstGeom prst="rect">
@@ -8738,7 +8944,7 @@
                 <a:ea typeface="Cambria" pitchFamily="34" charset="-122"/>
                 <a:cs typeface="Cambria" pitchFamily="34" charset="-120"/>
               </a:rPr>
-              <a:t>24 698 Kč / 1 017 €</a:t>
+              <a:t>26 569 Kč / 1 094 €</a:t>
             </a:r>
             <a:endParaRPr lang="en-US" sz="1550" dirty="0"/>
           </a:p>
@@ -8752,7 +8958,7 @@
         </p:nvSpPr>
         <p:spPr>
           <a:xfrm>
-            <a:off x="6537960" y="5340096"/>
+            <a:off x="6537960" y="5294376"/>
             <a:ext cx="4800600" cy="292608"/>
           </a:xfrm>
           <a:prstGeom prst="rect">
@@ -8791,7 +8997,7 @@
         </p:nvSpPr>
         <p:spPr>
           <a:xfrm>
-            <a:off x="6537960" y="5632704"/>
+            <a:off x="6537960" y="5586984"/>
             <a:ext cx="4800600" cy="365760"/>
           </a:xfrm>
           <a:prstGeom prst="rect">
@@ -8816,7 +9022,7 @@
                 <a:ea typeface="Cambria" pitchFamily="34" charset="-122"/>
                 <a:cs typeface="Cambria" pitchFamily="34" charset="-120"/>
               </a:rPr>
-              <a:t>32 931 Kč / 1 355 €</a:t>
+              <a:t>32 205 Kč / 1 326 €</a:t>
             </a:r>
             <a:endParaRPr lang="en-US" sz="1550" dirty="0"/>
           </a:p>
@@ -8830,8 +9036,8 @@
         </p:nvSpPr>
         <p:spPr>
           <a:xfrm>
-            <a:off x="457200" y="6537960"/>
-            <a:ext cx="8229600" cy="274320"/>
+            <a:off x="548640" y="6099048"/>
+            <a:ext cx="11064240" cy="274320"/>
           </a:xfrm>
           <a:prstGeom prst="rect">
             <a:avLst/>
@@ -8843,11 +9049,11 @@
           <a:bodyPr wrap="square" rtlCol="0" anchor="ctr"/>
           <a:lstStyle/>
           <a:p>
-            <a:pPr algn="l" indent="0" marL="0">
-              <a:buNone/>
-            </a:pPr>
-            <a:r>
-              <a:rPr lang="en-US" sz="900" dirty="0">
+            <a:pPr indent="0" marL="0">
+              <a:buNone/>
+            </a:pPr>
+            <a:r>
+              <a:rPr lang="en-US" sz="1000" i="1" dirty="0">
                 <a:solidFill>
                   <a:srgbClr val="6B6B6B"/>
                 </a:solidFill>
@@ -8855,6 +9061,45 @@
                 <a:ea typeface="Calibri" pitchFamily="34" charset="-122"/>
                 <a:cs typeface="Calibri" pitchFamily="34" charset="-120"/>
               </a:rPr>
+              <a:t>Bez reklamací optických vad exteriéru a interiéru (viz metodologie, str. 2).</a:t>
+            </a:r>
+            <a:endParaRPr lang="en-US" sz="1000" dirty="0"/>
+          </a:p>
+        </p:txBody>
+      </p:sp>
+      <p:sp>
+        <p:nvSpPr>
+          <p:cNvPr id="35" name="Text 33"/>
+          <p:cNvSpPr/>
+          <p:nvPr/>
+        </p:nvSpPr>
+        <p:spPr>
+          <a:xfrm>
+            <a:off x="457200" y="6537960"/>
+            <a:ext cx="8229600" cy="274320"/>
+          </a:xfrm>
+          <a:prstGeom prst="rect">
+            <a:avLst/>
+          </a:prstGeom>
+          <a:noFill/>
+          <a:ln/>
+        </p:spPr>
+        <p:txBody>
+          <a:bodyPr wrap="square" rtlCol="0" anchor="ctr"/>
+          <a:lstStyle/>
+          <a:p>
+            <a:pPr algn="l" indent="0" marL="0">
+              <a:buNone/>
+            </a:pPr>
+            <a:r>
+              <a:rPr lang="en-US" sz="900" dirty="0">
+                <a:solidFill>
+                  <a:srgbClr val="6B6B6B"/>
+                </a:solidFill>
+                <a:latin typeface="Calibri" pitchFamily="34" charset="0"/>
+                <a:ea typeface="Calibri" pitchFamily="34" charset="-122"/>
+                <a:cs typeface="Calibri" pitchFamily="34" charset="-120"/>
+              </a:rPr>
               <a:t>Carvago  |  Land Rover &amp; Jaguar — Prodeje a reklamace 2025–2026</a:t>
             </a:r>
             <a:endParaRPr lang="en-US" sz="900" dirty="0"/>
@@ -8863,7 +9108,7 @@
       </p:sp>
       <p:sp>
         <p:nvSpPr>
-          <p:cNvPr id="35" name="Text 33"/>
+          <p:cNvPr id="36" name="Text 34"/>
           <p:cNvSpPr/>
           <p:nvPr/>
         </p:nvSpPr>
@@ -9418,7 +9663,7 @@
                 <a:ea typeface="Cambria" pitchFamily="34" charset="-122"/>
                 <a:cs typeface="Cambria" pitchFamily="34" charset="-120"/>
               </a:rPr>
-              <a:t>37 %</a:t>
+              <a:t>35 %</a:t>
             </a:r>
             <a:endParaRPr lang="en-US" sz="4600" dirty="0"/>
           </a:p>
@@ -9513,7 +9758,7 @@
                 <a:ea typeface="Calibri" pitchFamily="34" charset="-122"/>
                 <a:cs typeface="Calibri" pitchFamily="34" charset="-120"/>
               </a:rPr>
-              <a:t>Čistý zisk po reklamacích: 61 508 €</a:t>
+              <a:t>Čistý zisk po reklamacích: 63 960 €</a:t>
             </a:r>
             <a:endParaRPr lang="en-US" sz="1150" dirty="0"/>
           </a:p>
@@ -9613,7 +9858,7 @@
                 <a:ea typeface="Cambria" pitchFamily="34" charset="-122"/>
                 <a:cs typeface="Cambria" pitchFamily="34" charset="-120"/>
               </a:rPr>
-              <a:t>71 %</a:t>
+              <a:t>70 %</a:t>
             </a:r>
             <a:endParaRPr lang="en-US" sz="4600" dirty="0"/>
           </a:p>
@@ -9708,7 +9953,7 @@
                 <a:ea typeface="Calibri" pitchFamily="34" charset="-122"/>
                 <a:cs typeface="Calibri" pitchFamily="34" charset="-120"/>
               </a:rPr>
-              <a:t>Čistý zisk po reklamacích: 18 036 €</a:t>
+              <a:t>Čistý zisk po reklamacích: 19 019 €</a:t>
             </a:r>
             <a:endParaRPr lang="en-US" sz="1150" dirty="0"/>
           </a:p>
@@ -9747,7 +9992,7 @@
                 <a:ea typeface="Calibri" pitchFamily="34" charset="-122"/>
                 <a:cs typeface="Calibri" pitchFamily="34" charset="-120"/>
               </a:rPr>
-              <a:t>Pozn.: marže je čistý obchodní zisk (Salesforce Margin GM1, Profit In Corporate Currency); reklamace do ní vstupují dodatečně jako náklad navíc. Srovnání s dalšími značkami na další straně.</a:t>
+              <a:t>Pozn.: marže je čistý obchodní zisk (Salesforce Margin GM1, Profit In Corporate Currency). Náklad na reklamace je bez optických vad exteriéru/interiéru. Srovnání s dalšími značkami na další straně.</a:t>
             </a:r>
             <a:endParaRPr lang="en-US" sz="1000" dirty="0"/>
           </a:p>
@@ -9974,7 +10219,7 @@
                 <a:ea typeface="Calibri" pitchFamily="34" charset="-122"/>
                 <a:cs typeface="Calibri" pitchFamily="34" charset="-120"/>
               </a:rPr>
-              <a:t>Podíl marže spotřebovaný náklady na reklamace — srovnání 15 značek (souhrnně 2025–2026)</a:t>
+              <a:t>Podíl marže spotřebovaný náklady na reklamace (bez optických vad exteriéru/interiéru) — srovnání 15 značek (souhrnně 2025–2026)</a:t>
             </a:r>
             <a:endParaRPr lang="en-US" sz="1300" dirty="0"/>
           </a:p>
@@ -10029,7 +10274,7 @@
                 <a:ea typeface="Calibri" pitchFamily="34" charset="-122"/>
                 <a:cs typeface="Calibri" pitchFamily="34" charset="-120"/>
               </a:rPr>
-              <a:t>Land Rover + Jaguar spotřebují reklamacemi 50,5 % vydělané marže — 2–10× více než kterákoli jiná srovnávaná značka (4,8–22,6 %).</a:t>
+              <a:t>Land Rover + Jaguar spotřebují reklamacemi (bez optiky) 48,4 % vydělané marže — 2,4–11,8× více než kterákoli jiná srovnávaná značka (4,1–20,5 %).</a:t>
             </a:r>
             <a:endParaRPr lang="en-US" sz="1150" dirty="0"/>
           </a:p>
@@ -10715,7 +10960,7 @@
                 <a:ea typeface="Cambria" pitchFamily="34" charset="-122"/>
                 <a:cs typeface="Cambria" pitchFamily="34" charset="-120"/>
               </a:rPr>
-              <a:t>Jak staré a najeté jsou vozy, na které vznikla reklamace</a:t>
+              <a:t>Jak staré a najeté jsou vozy s reklamací (bez optických vad)</a:t>
             </a:r>
             <a:endParaRPr lang="en-US" sz="3000" dirty="0"/>
           </a:p>
@@ -10781,7 +11026,7 @@
                 <a:ea typeface="Cambria" pitchFamily="34" charset="-122"/>
                 <a:cs typeface="Cambria" pitchFamily="34" charset="-120"/>
               </a:rPr>
-              <a:t>6,66 / 7,22 let</a:t>
+              <a:t>6,74 / 7,16 let</a:t>
             </a:r>
             <a:endParaRPr lang="en-US" sz="2400" dirty="0"/>
           </a:p>
@@ -10886,7 +11131,7 @@
                 <a:ea typeface="Cambria" pitchFamily="34" charset="-122"/>
                 <a:cs typeface="Cambria" pitchFamily="34" charset="-120"/>
               </a:rPr>
-              <a:t>100 043 / 93 779 km</a:t>
+              <a:t>101 446 / 94 591 km</a:t>
             </a:r>
             <a:endParaRPr lang="en-US" sz="2400" dirty="0"/>
           </a:p>
@@ -11096,7 +11341,7 @@
                 <a:ea typeface="Calibri" pitchFamily="34" charset="-122"/>
                 <a:cs typeface="Calibri" pitchFamily="34" charset="-120"/>
               </a:rPr>
-              <a:t>Reklamované vozy jsou v obou letech starší a najetější než průměr celého nákupu — v 2025 o +1,2 roku a +23 tis. km, v 2026 o +0,8 roku, ale jen +7 tis. km (problémy se objevují i u méně najetých vozů).</a:t>
+              <a:t>Reklamované vozy (bez optiky) jsou v obou letech starší a najetější než průměr celého nákupu — v 2025 o +1,3 roku a +24 tis. km, v 2026 o +0,8 roku a +8 tis. km.</a:t>
             </a:r>
             <a:endParaRPr lang="en-US" sz="1100" dirty="0"/>
           </a:p>
